--- a/public/marketing/FleetCo-Client-Presentation.pptx
+++ b/public/marketing/FleetCo-Client-Presentation.pptx
@@ -5148,11 +5148,11 @@
         <p:spPr>
           <a:xfrm>
             <a:off x="6309360" y="1554480"/>
-            <a:ext cx="2697480" cy="2606040"/>
+            <a:ext cx="2697480" cy="2743200"/>
           </a:xfrm>
           <a:prstGeom prst="roundRect">
             <a:avLst>
-              <a:gd name="adj" fmla="val 2807"/>
+              <a:gd name="adj" fmla="val 2712"/>
             </a:avLst>
           </a:prstGeom>
           <a:solidFill>
@@ -5227,14 +5227,14 @@
               <a:buNone/>
             </a:pPr>
             <a:r>
-              <a:rPr lang="en-US" sz="2000" b="1" dirty="0">
+              <a:rPr lang="en-US" sz="1600" b="1" dirty="0">
                 <a:solidFill>
                   <a:srgbClr val="F59E0B"/>
                 </a:solidFill>
               </a:rPr>
-              <a:t>$999/mo</a:t>
-            </a:r>
-            <a:endParaRPr lang="en-US" sz="2000" dirty="0"/>
+              <a:t>Custom pricing</a:t>
+            </a:r>
+            <a:endParaRPr lang="en-US" sz="1600" dirty="0"/>
           </a:p>
         </p:txBody>
       </p:sp>
@@ -5246,7 +5246,43 @@
         </p:nvSpPr>
         <p:spPr>
           <a:xfrm>
-            <a:off x="6446520" y="2606040"/>
+            <a:off x="6446520" y="2514600"/>
+            <a:ext cx="2468880" cy="228600"/>
+          </a:xfrm>
+          <a:prstGeom prst="rect">
+            <a:avLst/>
+          </a:prstGeom>
+          <a:noFill/>
+          <a:ln/>
+        </p:spPr>
+        <p:txBody>
+          <a:bodyPr wrap="square" rtlCol="0" anchor="ctr"/>
+          <a:lstStyle/>
+          <a:p>
+            <a:pPr indent="0" marL="0">
+              <a:buNone/>
+            </a:pPr>
+            <a:r>
+              <a:rPr lang="en-US" sz="1000" i="1" dirty="0">
+                <a:solidFill>
+                  <a:srgbClr val="64748B"/>
+                </a:solidFill>
+              </a:rPr>
+              <a:t>Quote on request</a:t>
+            </a:r>
+            <a:endParaRPr lang="en-US" sz="1000" dirty="0"/>
+          </a:p>
+        </p:txBody>
+      </p:sp>
+      <p:sp>
+        <p:nvSpPr>
+          <p:cNvPr id="18" name="Text 16"/>
+          <p:cNvSpPr/>
+          <p:nvPr/>
+        </p:nvSpPr>
+        <p:spPr>
+          <a:xfrm>
+            <a:off x="6446520" y="2788920"/>
             <a:ext cx="2468880" cy="274320"/>
           </a:xfrm>
           <a:prstGeom prst="rect">
@@ -5276,13 +5312,13 @@
       </p:sp>
       <p:sp>
         <p:nvSpPr>
-          <p:cNvPr id="18" name="Text 16"/>
-          <p:cNvSpPr/>
-          <p:nvPr/>
-        </p:nvSpPr>
-        <p:spPr>
-          <a:xfrm>
-            <a:off x="6446520" y="2926080"/>
+          <p:cNvPr id="19" name="Text 17"/>
+          <p:cNvSpPr/>
+          <p:nvPr/>
+        </p:nvSpPr>
+        <p:spPr>
+          <a:xfrm>
+            <a:off x="6446520" y="3063240"/>
             <a:ext cx="2468880" cy="1005840"/>
           </a:xfrm>
           <a:prstGeom prst="rect">
@@ -5304,7 +5340,7 @@
                   <a:srgbClr val="64748B"/>
                 </a:solidFill>
               </a:rPr>
-              <a:t>Full-service · telematics · tax docs · dedicated account team</a:t>
+              <a:t>Tailored scope · telematics · custom integrations · dedicated account team</a:t>
             </a:r>
             <a:endParaRPr lang="en-US" sz="1000" dirty="0"/>
           </a:p>
@@ -5312,7 +5348,7 @@
       </p:sp>
       <p:sp>
         <p:nvSpPr>
-          <p:cNvPr id="19" name="Text 17"/>
+          <p:cNvPr id="20" name="Text 18"/>
           <p:cNvSpPr/>
           <p:nvPr/>
         </p:nvSpPr>
@@ -5348,7 +5384,7 @@
       </p:sp>
       <p:sp>
         <p:nvSpPr>
-          <p:cNvPr id="20" name="Text 18"/>
+          <p:cNvPr id="21" name="Text 19"/>
           <p:cNvSpPr/>
           <p:nvPr/>
         </p:nvSpPr>

--- a/public/marketing/FleetCo-Client-Presentation.pptx
+++ b/public/marketing/FleetCo-Client-Presentation.pptx
@@ -5608,7 +5608,7 @@
                   <a:srgbClr val="FFFFFF"/>
                 </a:solidFill>
               </a:rPr>
-              <a:t>info@fleetcomanagement.org  ·  (360) 952-1249  ·  Dallas, TX</a:t>
+              <a:t>support@fleetcomanagement.org  ·  (360) 952-1249  ·  Dallas, TX</a:t>
             </a:r>
             <a:endParaRPr lang="en-US" sz="1400" dirty="0"/>
           </a:p>
@@ -5644,7 +5644,7 @@
                   <a:srgbClr val="FFFFFF"/>
                 </a:solidFill>
               </a:rPr>
-              <a:t>JaRell D. Slack</a:t>
+              <a:t>Fleetco Management LLC</a:t>
             </a:r>
             <a:endParaRPr lang="en-US" sz="1200" dirty="0"/>
           </a:p>
@@ -5658,7 +5658,7 @@
         </p:nvSpPr>
         <p:spPr>
           <a:xfrm>
-            <a:off x="548640" y="4434840"/>
+            <a:off x="548640" y="4480560"/>
             <a:ext cx="8229600" cy="274320"/>
           </a:xfrm>
           <a:prstGeom prst="rect">
@@ -5680,7 +5680,7 @@
                   <a:srgbClr val="64748B"/>
                 </a:solidFill>
               </a:rPr>
-              <a:t>Owner, Director of Fleet Management</a:t>
+              <a:t>Dallas, TX</a:t>
             </a:r>
             <a:endParaRPr lang="en-US" sz="1000" dirty="0"/>
           </a:p>
@@ -5689,78 +5689,6 @@
       <p:sp>
         <p:nvSpPr>
           <p:cNvPr id="9" name="Text 7"/>
-          <p:cNvSpPr/>
-          <p:nvPr/>
-        </p:nvSpPr>
-        <p:spPr>
-          <a:xfrm>
-            <a:off x="548640" y="4800600"/>
-            <a:ext cx="8229600" cy="320040"/>
-          </a:xfrm>
-          <a:prstGeom prst="rect">
-            <a:avLst/>
-          </a:prstGeom>
-          <a:noFill/>
-          <a:ln/>
-        </p:spPr>
-        <p:txBody>
-          <a:bodyPr wrap="square" rtlCol="0" anchor="ctr"/>
-          <a:lstStyle/>
-          <a:p>
-            <a:pPr algn="ctr" indent="0" marL="0">
-              <a:buNone/>
-            </a:pPr>
-            <a:r>
-              <a:rPr lang="en-US" sz="1200" b="1" dirty="0">
-                <a:solidFill>
-                  <a:srgbClr val="FFFFFF"/>
-                </a:solidFill>
-              </a:rPr>
-              <a:t>Desiree M. Clark</a:t>
-            </a:r>
-            <a:endParaRPr lang="en-US" sz="1200" dirty="0"/>
-          </a:p>
-        </p:txBody>
-      </p:sp>
-      <p:sp>
-        <p:nvSpPr>
-          <p:cNvPr id="10" name="Text 8"/>
-          <p:cNvSpPr/>
-          <p:nvPr/>
-        </p:nvSpPr>
-        <p:spPr>
-          <a:xfrm>
-            <a:off x="548640" y="5120640"/>
-            <a:ext cx="8229600" cy="274320"/>
-          </a:xfrm>
-          <a:prstGeom prst="rect">
-            <a:avLst/>
-          </a:prstGeom>
-          <a:noFill/>
-          <a:ln/>
-        </p:spPr>
-        <p:txBody>
-          <a:bodyPr wrap="square" rtlCol="0" anchor="ctr"/>
-          <a:lstStyle/>
-          <a:p>
-            <a:pPr algn="ctr" indent="0" marL="0">
-              <a:buNone/>
-            </a:pPr>
-            <a:r>
-              <a:rPr lang="en-US" sz="1000" dirty="0">
-                <a:solidFill>
-                  <a:srgbClr val="64748B"/>
-                </a:solidFill>
-              </a:rPr>
-              <a:t>Co-Owner, Director of Operations</a:t>
-            </a:r>
-            <a:endParaRPr lang="en-US" sz="1000" dirty="0"/>
-          </a:p>
-        </p:txBody>
-      </p:sp>
-      <p:sp>
-        <p:nvSpPr>
-          <p:cNvPr id="11" name="Text 9"/>
           <p:cNvSpPr/>
           <p:nvPr/>
         </p:nvSpPr>
@@ -5788,7 +5716,7 @@
                   <a:srgbClr val="64748B"/>
                 </a:solidFill>
               </a:rPr>
-              <a:t>Fleetco Management LLC</a:t>
+              <a:t>FleetCo Management LLC</a:t>
             </a:r>
             <a:endParaRPr lang="en-US" sz="1000" dirty="0"/>
           </a:p>
